--- a/ゲーム科2年/00_前期/ゲーム開発Ⅰ/ゲーム物理学/座学/17_摩擦力.pptx
+++ b/ゲーム科2年/00_前期/ゲーム開発Ⅰ/ゲーム物理学/座学/17_摩擦力.pptx
@@ -11,14 +11,15 @@
     <p:sldId id="265" r:id="rId5"/>
     <p:sldId id="266" r:id="rId6"/>
     <p:sldId id="267" r:id="rId7"/>
-    <p:sldId id="268" r:id="rId8"/>
-    <p:sldId id="269" r:id="rId9"/>
-    <p:sldId id="270" r:id="rId10"/>
-    <p:sldId id="271" r:id="rId11"/>
-    <p:sldId id="272" r:id="rId12"/>
-    <p:sldId id="273" r:id="rId13"/>
-    <p:sldId id="274" r:id="rId14"/>
-    <p:sldId id="275" r:id="rId15"/>
+    <p:sldId id="276" r:id="rId8"/>
+    <p:sldId id="268" r:id="rId9"/>
+    <p:sldId id="269" r:id="rId10"/>
+    <p:sldId id="270" r:id="rId11"/>
+    <p:sldId id="271" r:id="rId12"/>
+    <p:sldId id="272" r:id="rId13"/>
+    <p:sldId id="273" r:id="rId14"/>
+    <p:sldId id="274" r:id="rId15"/>
+    <p:sldId id="275" r:id="rId16"/>
   </p:sldIdLst>
   <p:sldSz cx="12192000" cy="6858000"/>
   <p:notesSz cx="6858000" cy="9144000"/>
@@ -272,7 +273,7 @@
           <a:p>
             <a:fld id="{E9CC885B-4903-4D54-9A93-00025F12DED9}" type="datetimeFigureOut">
               <a:rPr kumimoji="1" lang="ja-JP" altLang="en-US" smtClean="0"/>
-              <a:t>2025/7/31</a:t>
+              <a:t>2025/9/24</a:t>
             </a:fld>
             <a:endParaRPr kumimoji="1" lang="ja-JP" altLang="en-US"/>
           </a:p>
@@ -502,7 +503,7 @@
           <a:p>
             <a:fld id="{E9CC885B-4903-4D54-9A93-00025F12DED9}" type="datetimeFigureOut">
               <a:rPr kumimoji="1" lang="ja-JP" altLang="en-US" smtClean="0"/>
-              <a:t>2025/7/31</a:t>
+              <a:t>2025/9/24</a:t>
             </a:fld>
             <a:endParaRPr kumimoji="1" lang="ja-JP" altLang="en-US"/>
           </a:p>
@@ -742,7 +743,7 @@
           <a:p>
             <a:fld id="{E9CC885B-4903-4D54-9A93-00025F12DED9}" type="datetimeFigureOut">
               <a:rPr kumimoji="1" lang="ja-JP" altLang="en-US" smtClean="0"/>
-              <a:t>2025/7/31</a:t>
+              <a:t>2025/9/24</a:t>
             </a:fld>
             <a:endParaRPr kumimoji="1" lang="ja-JP" altLang="en-US"/>
           </a:p>
@@ -972,7 +973,7 @@
           <a:p>
             <a:fld id="{E9CC885B-4903-4D54-9A93-00025F12DED9}" type="datetimeFigureOut">
               <a:rPr kumimoji="1" lang="ja-JP" altLang="en-US" smtClean="0"/>
-              <a:t>2025/7/31</a:t>
+              <a:t>2025/9/24</a:t>
             </a:fld>
             <a:endParaRPr kumimoji="1" lang="ja-JP" altLang="en-US"/>
           </a:p>
@@ -1247,7 +1248,7 @@
           <a:p>
             <a:fld id="{E9CC885B-4903-4D54-9A93-00025F12DED9}" type="datetimeFigureOut">
               <a:rPr kumimoji="1" lang="ja-JP" altLang="en-US" smtClean="0"/>
-              <a:t>2025/7/31</a:t>
+              <a:t>2025/9/24</a:t>
             </a:fld>
             <a:endParaRPr kumimoji="1" lang="ja-JP" altLang="en-US"/>
           </a:p>
@@ -1576,7 +1577,7 @@
           <a:p>
             <a:fld id="{E9CC885B-4903-4D54-9A93-00025F12DED9}" type="datetimeFigureOut">
               <a:rPr kumimoji="1" lang="ja-JP" altLang="en-US" smtClean="0"/>
-              <a:t>2025/7/31</a:t>
+              <a:t>2025/9/24</a:t>
             </a:fld>
             <a:endParaRPr kumimoji="1" lang="ja-JP" altLang="en-US"/>
           </a:p>
@@ -2052,7 +2053,7 @@
           <a:p>
             <a:fld id="{E9CC885B-4903-4D54-9A93-00025F12DED9}" type="datetimeFigureOut">
               <a:rPr kumimoji="1" lang="ja-JP" altLang="en-US" smtClean="0"/>
-              <a:t>2025/7/31</a:t>
+              <a:t>2025/9/24</a:t>
             </a:fld>
             <a:endParaRPr kumimoji="1" lang="ja-JP" altLang="en-US"/>
           </a:p>
@@ -2193,7 +2194,7 @@
           <a:p>
             <a:fld id="{E9CC885B-4903-4D54-9A93-00025F12DED9}" type="datetimeFigureOut">
               <a:rPr kumimoji="1" lang="ja-JP" altLang="en-US" smtClean="0"/>
-              <a:t>2025/7/31</a:t>
+              <a:t>2025/9/24</a:t>
             </a:fld>
             <a:endParaRPr kumimoji="1" lang="ja-JP" altLang="en-US"/>
           </a:p>
@@ -2306,7 +2307,7 @@
           <a:p>
             <a:fld id="{E9CC885B-4903-4D54-9A93-00025F12DED9}" type="datetimeFigureOut">
               <a:rPr kumimoji="1" lang="ja-JP" altLang="en-US" smtClean="0"/>
-              <a:t>2025/7/31</a:t>
+              <a:t>2025/9/24</a:t>
             </a:fld>
             <a:endParaRPr kumimoji="1" lang="ja-JP" altLang="en-US"/>
           </a:p>
@@ -2649,7 +2650,7 @@
           <a:p>
             <a:fld id="{E9CC885B-4903-4D54-9A93-00025F12DED9}" type="datetimeFigureOut">
               <a:rPr kumimoji="1" lang="ja-JP" altLang="en-US" smtClean="0"/>
-              <a:t>2025/7/31</a:t>
+              <a:t>2025/9/24</a:t>
             </a:fld>
             <a:endParaRPr kumimoji="1" lang="ja-JP" altLang="en-US"/>
           </a:p>
@@ -2937,7 +2938,7 @@
           <a:p>
             <a:fld id="{E9CC885B-4903-4D54-9A93-00025F12DED9}" type="datetimeFigureOut">
               <a:rPr kumimoji="1" lang="ja-JP" altLang="en-US" smtClean="0"/>
-              <a:t>2025/7/31</a:t>
+              <a:t>2025/9/24</a:t>
             </a:fld>
             <a:endParaRPr kumimoji="1" lang="ja-JP" altLang="en-US"/>
           </a:p>
@@ -3210,7 +3211,7 @@
           <a:p>
             <a:fld id="{E9CC885B-4903-4D54-9A93-00025F12DED9}" type="datetimeFigureOut">
               <a:rPr kumimoji="1" lang="ja-JP" altLang="en-US" smtClean="0"/>
-              <a:t>2025/7/31</a:t>
+              <a:t>2025/9/24</a:t>
             </a:fld>
             <a:endParaRPr kumimoji="1" lang="ja-JP" altLang="en-US"/>
           </a:p>
@@ -4281,6 +4282,517 @@
       </p:grpSpPr>
       <p:sp>
         <p:nvSpPr>
+          <p:cNvPr id="4" name="テキスト ボックス 3">
+            <a:extLst>
+              <a:ext uri="{FF2B5EF4-FFF2-40B4-BE49-F238E27FC236}">
+                <a16:creationId xmlns:a16="http://schemas.microsoft.com/office/drawing/2014/main" id="{5A13BF46-B8C5-48AA-8308-C9ECFF431A18}"/>
+              </a:ext>
+            </a:extLst>
+          </p:cNvPr>
+          <p:cNvSpPr txBox="1"/>
+          <p:nvPr/>
+        </p:nvSpPr>
+        <p:spPr>
+          <a:xfrm>
+            <a:off x="567542" y="491954"/>
+            <a:ext cx="1415772" cy="584775"/>
+          </a:xfrm>
+          <a:prstGeom prst="rect">
+            <a:avLst/>
+          </a:prstGeom>
+          <a:noFill/>
+        </p:spPr>
+        <p:txBody>
+          <a:bodyPr wrap="none" rtlCol="0">
+            <a:spAutoFit/>
+          </a:bodyPr>
+          <a:lstStyle/>
+          <a:p>
+            <a:r>
+              <a:rPr kumimoji="1" lang="ja-JP" altLang="en-US" sz="3200" b="1" u="sng" dirty="0"/>
+              <a:t>摩擦力</a:t>
+            </a:r>
+            <a:endParaRPr kumimoji="1" lang="en-US" altLang="ja-JP" sz="3200" b="1" u="sng" dirty="0"/>
+          </a:p>
+        </p:txBody>
+      </p:sp>
+      <p:sp>
+        <p:nvSpPr>
+          <p:cNvPr id="6" name="テキスト ボックス 5">
+            <a:extLst>
+              <a:ext uri="{FF2B5EF4-FFF2-40B4-BE49-F238E27FC236}">
+                <a16:creationId xmlns:a16="http://schemas.microsoft.com/office/drawing/2014/main" id="{55830AD6-028B-4C4E-80BF-B70DFC1C3A46}"/>
+              </a:ext>
+            </a:extLst>
+          </p:cNvPr>
+          <p:cNvSpPr txBox="1"/>
+          <p:nvPr/>
+        </p:nvSpPr>
+        <p:spPr>
+          <a:xfrm>
+            <a:off x="567542" y="1216429"/>
+            <a:ext cx="7879080" cy="461665"/>
+          </a:xfrm>
+          <a:prstGeom prst="rect">
+            <a:avLst/>
+          </a:prstGeom>
+          <a:noFill/>
+        </p:spPr>
+        <p:txBody>
+          <a:bodyPr wrap="none" rtlCol="0">
+            <a:spAutoFit/>
+          </a:bodyPr>
+          <a:lstStyle/>
+          <a:p>
+            <a:r>
+              <a:rPr lang="ja-JP" altLang="en-US" sz="2400" dirty="0"/>
+              <a:t>運動摩擦力は動いているものに対して働く摩擦力です。</a:t>
+            </a:r>
+            <a:endParaRPr lang="en-US" altLang="ja-JP" sz="2400" b="0" dirty="0"/>
+          </a:p>
+        </p:txBody>
+      </p:sp>
+      <p:grpSp>
+        <p:nvGrpSpPr>
+          <p:cNvPr id="5" name="グループ化 4">
+            <a:extLst>
+              <a:ext uri="{FF2B5EF4-FFF2-40B4-BE49-F238E27FC236}">
+                <a16:creationId xmlns:a16="http://schemas.microsoft.com/office/drawing/2014/main" id="{1B69A5F0-E23F-4035-A684-28D16776EF7E}"/>
+              </a:ext>
+            </a:extLst>
+          </p:cNvPr>
+          <p:cNvGrpSpPr/>
+          <p:nvPr/>
+        </p:nvGrpSpPr>
+        <p:grpSpPr>
+          <a:xfrm>
+            <a:off x="567542" y="2622603"/>
+            <a:ext cx="2522791" cy="2341525"/>
+            <a:chOff x="2114550" y="3236950"/>
+            <a:chExt cx="2522791" cy="2341525"/>
+          </a:xfrm>
+        </p:grpSpPr>
+        <p:cxnSp>
+          <p:nvCxnSpPr>
+            <p:cNvPr id="7" name="直線コネクタ 6">
+              <a:extLst>
+                <a:ext uri="{FF2B5EF4-FFF2-40B4-BE49-F238E27FC236}">
+                  <a16:creationId xmlns:a16="http://schemas.microsoft.com/office/drawing/2014/main" id="{2FF5C351-82D3-42FC-AB35-1732EF0DA162}"/>
+                </a:ext>
+              </a:extLst>
+            </p:cNvPr>
+            <p:cNvCxnSpPr>
+              <a:cxnSpLocks/>
+            </p:cNvCxnSpPr>
+            <p:nvPr/>
+          </p:nvCxnSpPr>
+          <p:spPr>
+            <a:xfrm flipV="1">
+              <a:off x="2114550" y="3236950"/>
+              <a:ext cx="2522791" cy="2341525"/>
+            </a:xfrm>
+            <a:prstGeom prst="line">
+              <a:avLst/>
+            </a:prstGeom>
+            <a:ln w="38100">
+              <a:solidFill>
+                <a:schemeClr val="bg1">
+                  <a:lumMod val="50000"/>
+                </a:schemeClr>
+              </a:solidFill>
+            </a:ln>
+          </p:spPr>
+          <p:style>
+            <a:lnRef idx="1">
+              <a:schemeClr val="accent1"/>
+            </a:lnRef>
+            <a:fillRef idx="0">
+              <a:schemeClr val="accent1"/>
+            </a:fillRef>
+            <a:effectRef idx="0">
+              <a:schemeClr val="accent1"/>
+            </a:effectRef>
+            <a:fontRef idx="minor">
+              <a:schemeClr val="tx1"/>
+            </a:fontRef>
+          </p:style>
+        </p:cxnSp>
+        <p:sp>
+          <p:nvSpPr>
+            <p:cNvPr id="8" name="台形 7">
+              <a:extLst>
+                <a:ext uri="{FF2B5EF4-FFF2-40B4-BE49-F238E27FC236}">
+                  <a16:creationId xmlns:a16="http://schemas.microsoft.com/office/drawing/2014/main" id="{F64C426F-B3E6-4881-91F5-58871260F313}"/>
+                </a:ext>
+              </a:extLst>
+            </p:cNvPr>
+            <p:cNvSpPr/>
+            <p:nvPr/>
+          </p:nvSpPr>
+          <p:spPr>
+            <a:xfrm rot="19022851">
+              <a:off x="2521895" y="3850813"/>
+              <a:ext cx="1109133" cy="685800"/>
+            </a:xfrm>
+            <a:prstGeom prst="trapezoid">
+              <a:avLst/>
+            </a:prstGeom>
+          </p:spPr>
+          <p:style>
+            <a:lnRef idx="2">
+              <a:schemeClr val="accent3">
+                <a:shade val="50000"/>
+              </a:schemeClr>
+            </a:lnRef>
+            <a:fillRef idx="1">
+              <a:schemeClr val="accent3"/>
+            </a:fillRef>
+            <a:effectRef idx="0">
+              <a:schemeClr val="accent3"/>
+            </a:effectRef>
+            <a:fontRef idx="minor">
+              <a:schemeClr val="lt1"/>
+            </a:fontRef>
+          </p:style>
+          <p:txBody>
+            <a:bodyPr rtlCol="0" anchor="ctr"/>
+            <a:lstStyle/>
+            <a:p>
+              <a:pPr algn="ctr"/>
+              <a:r>
+                <a:rPr kumimoji="1" lang="ja-JP" altLang="en-US" b="1" dirty="0"/>
+                <a:t>重り</a:t>
+              </a:r>
+            </a:p>
+          </p:txBody>
+        </p:sp>
+      </p:grpSp>
+      <p:cxnSp>
+        <p:nvCxnSpPr>
+          <p:cNvPr id="9" name="直線コネクタ 8">
+            <a:extLst>
+              <a:ext uri="{FF2B5EF4-FFF2-40B4-BE49-F238E27FC236}">
+                <a16:creationId xmlns:a16="http://schemas.microsoft.com/office/drawing/2014/main" id="{718A324A-0A74-454F-B6FF-D2F6D0644CB4}"/>
+              </a:ext>
+            </a:extLst>
+          </p:cNvPr>
+          <p:cNvCxnSpPr>
+            <a:cxnSpLocks/>
+          </p:cNvCxnSpPr>
+          <p:nvPr/>
+        </p:nvCxnSpPr>
+        <p:spPr>
+          <a:xfrm flipV="1">
+            <a:off x="1604432" y="2059337"/>
+            <a:ext cx="764820" cy="719667"/>
+          </a:xfrm>
+          <a:prstGeom prst="line">
+            <a:avLst/>
+          </a:prstGeom>
+          <a:ln w="38100">
+            <a:solidFill>
+              <a:schemeClr val="tx1"/>
+            </a:solidFill>
+          </a:ln>
+        </p:spPr>
+        <p:style>
+          <a:lnRef idx="1">
+            <a:schemeClr val="accent1"/>
+          </a:lnRef>
+          <a:fillRef idx="0">
+            <a:schemeClr val="accent1"/>
+          </a:fillRef>
+          <a:effectRef idx="0">
+            <a:schemeClr val="accent1"/>
+          </a:effectRef>
+          <a:fontRef idx="minor">
+            <a:schemeClr val="tx1"/>
+          </a:fontRef>
+        </p:style>
+      </p:cxnSp>
+      <p:cxnSp>
+        <p:nvCxnSpPr>
+          <p:cNvPr id="10" name="直線コネクタ 9">
+            <a:extLst>
+              <a:ext uri="{FF2B5EF4-FFF2-40B4-BE49-F238E27FC236}">
+                <a16:creationId xmlns:a16="http://schemas.microsoft.com/office/drawing/2014/main" id="{BF3C9F56-5ABC-470E-9D8F-1470E08B0A6D}"/>
+              </a:ext>
+            </a:extLst>
+          </p:cNvPr>
+          <p:cNvCxnSpPr>
+            <a:cxnSpLocks/>
+          </p:cNvCxnSpPr>
+          <p:nvPr/>
+        </p:nvCxnSpPr>
+        <p:spPr>
+          <a:xfrm flipV="1">
+            <a:off x="2020177" y="1817794"/>
+            <a:ext cx="961679" cy="929276"/>
+          </a:xfrm>
+          <a:prstGeom prst="line">
+            <a:avLst/>
+          </a:prstGeom>
+          <a:ln w="38100">
+            <a:solidFill>
+              <a:schemeClr val="tx1"/>
+            </a:solidFill>
+          </a:ln>
+        </p:spPr>
+        <p:style>
+          <a:lnRef idx="1">
+            <a:schemeClr val="accent1"/>
+          </a:lnRef>
+          <a:fillRef idx="0">
+            <a:schemeClr val="accent1"/>
+          </a:fillRef>
+          <a:effectRef idx="0">
+            <a:schemeClr val="accent1"/>
+          </a:effectRef>
+          <a:fontRef idx="minor">
+            <a:schemeClr val="tx1"/>
+          </a:fontRef>
+        </p:style>
+      </p:cxnSp>
+      <p:cxnSp>
+        <p:nvCxnSpPr>
+          <p:cNvPr id="11" name="直線コネクタ 10">
+            <a:extLst>
+              <a:ext uri="{FF2B5EF4-FFF2-40B4-BE49-F238E27FC236}">
+                <a16:creationId xmlns:a16="http://schemas.microsoft.com/office/drawing/2014/main" id="{10F344DC-E54C-4B63-A2C3-34CD54608A53}"/>
+              </a:ext>
+            </a:extLst>
+          </p:cNvPr>
+          <p:cNvCxnSpPr>
+            <a:cxnSpLocks/>
+          </p:cNvCxnSpPr>
+          <p:nvPr/>
+        </p:nvCxnSpPr>
+        <p:spPr>
+          <a:xfrm flipV="1">
+            <a:off x="2038938" y="2520945"/>
+            <a:ext cx="596299" cy="531355"/>
+          </a:xfrm>
+          <a:prstGeom prst="line">
+            <a:avLst/>
+          </a:prstGeom>
+          <a:ln w="38100">
+            <a:solidFill>
+              <a:schemeClr val="tx1"/>
+            </a:solidFill>
+          </a:ln>
+        </p:spPr>
+        <p:style>
+          <a:lnRef idx="1">
+            <a:schemeClr val="accent1"/>
+          </a:lnRef>
+          <a:fillRef idx="0">
+            <a:schemeClr val="accent1"/>
+          </a:fillRef>
+          <a:effectRef idx="0">
+            <a:schemeClr val="accent1"/>
+          </a:effectRef>
+          <a:fontRef idx="minor">
+            <a:schemeClr val="tx1"/>
+          </a:fontRef>
+        </p:style>
+      </p:cxnSp>
+      <p:cxnSp>
+        <p:nvCxnSpPr>
+          <p:cNvPr id="3" name="直線矢印コネクタ 2">
+            <a:extLst>
+              <a:ext uri="{FF2B5EF4-FFF2-40B4-BE49-F238E27FC236}">
+                <a16:creationId xmlns:a16="http://schemas.microsoft.com/office/drawing/2014/main" id="{2714CCAD-8BA9-4ECA-99E3-ED81FDB3E9B0}"/>
+              </a:ext>
+            </a:extLst>
+          </p:cNvPr>
+          <p:cNvCxnSpPr/>
+          <p:nvPr/>
+        </p:nvCxnSpPr>
+        <p:spPr>
+          <a:xfrm flipH="1">
+            <a:off x="2252133" y="3141133"/>
+            <a:ext cx="838200" cy="846667"/>
+          </a:xfrm>
+          <a:prstGeom prst="straightConnector1">
+            <a:avLst/>
+          </a:prstGeom>
+          <a:ln w="38100">
+            <a:solidFill>
+              <a:srgbClr val="FF0000"/>
+            </a:solidFill>
+            <a:tailEnd type="triangle"/>
+          </a:ln>
+        </p:spPr>
+        <p:style>
+          <a:lnRef idx="1">
+            <a:schemeClr val="accent1"/>
+          </a:lnRef>
+          <a:fillRef idx="0">
+            <a:schemeClr val="accent1"/>
+          </a:fillRef>
+          <a:effectRef idx="0">
+            <a:schemeClr val="accent1"/>
+          </a:effectRef>
+          <a:fontRef idx="minor">
+            <a:schemeClr val="tx1"/>
+          </a:fontRef>
+        </p:style>
+      </p:cxnSp>
+      <p:sp>
+        <p:nvSpPr>
+          <p:cNvPr id="14" name="テキスト ボックス 13">
+            <a:extLst>
+              <a:ext uri="{FF2B5EF4-FFF2-40B4-BE49-F238E27FC236}">
+                <a16:creationId xmlns:a16="http://schemas.microsoft.com/office/drawing/2014/main" id="{C7EFC35B-4CD9-45E6-B486-2C5CB5A368A0}"/>
+              </a:ext>
+            </a:extLst>
+          </p:cNvPr>
+          <p:cNvSpPr txBox="1"/>
+          <p:nvPr/>
+        </p:nvSpPr>
+        <p:spPr>
+          <a:xfrm>
+            <a:off x="2671233" y="3579366"/>
+            <a:ext cx="1107996" cy="646331"/>
+          </a:xfrm>
+          <a:prstGeom prst="rect">
+            <a:avLst/>
+          </a:prstGeom>
+          <a:noFill/>
+        </p:spPr>
+        <p:txBody>
+          <a:bodyPr wrap="none" rtlCol="0">
+            <a:spAutoFit/>
+          </a:bodyPr>
+          <a:lstStyle/>
+          <a:p>
+            <a:r>
+              <a:rPr lang="ja-JP" altLang="en-US" sz="2400" dirty="0"/>
+              <a:t>滑る力</a:t>
+            </a:r>
+            <a:endParaRPr lang="en-US" altLang="ja-JP" sz="2400" dirty="0"/>
+          </a:p>
+          <a:p>
+            <a:r>
+              <a:rPr lang="ja-JP" altLang="en-US" sz="1200" b="0" dirty="0"/>
+              <a:t>だけでなく</a:t>
+            </a:r>
+            <a:endParaRPr lang="en-US" altLang="ja-JP" sz="1200" b="0" dirty="0"/>
+          </a:p>
+        </p:txBody>
+      </p:sp>
+      <p:cxnSp>
+        <p:nvCxnSpPr>
+          <p:cNvPr id="15" name="直線矢印コネクタ 14">
+            <a:extLst>
+              <a:ext uri="{FF2B5EF4-FFF2-40B4-BE49-F238E27FC236}">
+                <a16:creationId xmlns:a16="http://schemas.microsoft.com/office/drawing/2014/main" id="{FFA122FC-A037-4D45-98B4-95CF45C4F5CF}"/>
+              </a:ext>
+            </a:extLst>
+          </p:cNvPr>
+          <p:cNvCxnSpPr>
+            <a:cxnSpLocks/>
+          </p:cNvCxnSpPr>
+          <p:nvPr/>
+        </p:nvCxnSpPr>
+        <p:spPr>
+          <a:xfrm flipV="1">
+            <a:off x="1359593" y="4605468"/>
+            <a:ext cx="339720" cy="358660"/>
+          </a:xfrm>
+          <a:prstGeom prst="straightConnector1">
+            <a:avLst/>
+          </a:prstGeom>
+          <a:ln w="38100">
+            <a:solidFill>
+              <a:srgbClr val="00B050"/>
+            </a:solidFill>
+            <a:tailEnd type="triangle"/>
+          </a:ln>
+        </p:spPr>
+        <p:style>
+          <a:lnRef idx="1">
+            <a:schemeClr val="accent1"/>
+          </a:lnRef>
+          <a:fillRef idx="0">
+            <a:schemeClr val="accent1"/>
+          </a:fillRef>
+          <a:effectRef idx="0">
+            <a:schemeClr val="accent1"/>
+          </a:effectRef>
+          <a:fontRef idx="minor">
+            <a:schemeClr val="tx1"/>
+          </a:fontRef>
+        </p:style>
+      </p:cxnSp>
+      <p:sp>
+        <p:nvSpPr>
+          <p:cNvPr id="17" name="テキスト ボックス 16">
+            <a:extLst>
+              <a:ext uri="{FF2B5EF4-FFF2-40B4-BE49-F238E27FC236}">
+                <a16:creationId xmlns:a16="http://schemas.microsoft.com/office/drawing/2014/main" id="{10F5EA89-254C-4FA0-B7E7-A9A57BC38A62}"/>
+              </a:ext>
+            </a:extLst>
+          </p:cNvPr>
+          <p:cNvSpPr txBox="1"/>
+          <p:nvPr/>
+        </p:nvSpPr>
+        <p:spPr>
+          <a:xfrm>
+            <a:off x="1557469" y="4784798"/>
+            <a:ext cx="3877985" cy="461665"/>
+          </a:xfrm>
+          <a:prstGeom prst="rect">
+            <a:avLst/>
+          </a:prstGeom>
+          <a:noFill/>
+        </p:spPr>
+        <p:txBody>
+          <a:bodyPr wrap="none" rtlCol="0">
+            <a:spAutoFit/>
+          </a:bodyPr>
+          <a:lstStyle/>
+          <a:p>
+            <a:r>
+              <a:rPr lang="ja-JP" altLang="en-US" sz="2400" dirty="0"/>
+              <a:t>運動摩擦力が抵抗している</a:t>
+            </a:r>
+            <a:endParaRPr lang="en-US" altLang="ja-JP" sz="1200" b="0" dirty="0"/>
+          </a:p>
+        </p:txBody>
+      </p:sp>
+    </p:spTree>
+    <p:extLst>
+      <p:ext uri="{BB962C8B-B14F-4D97-AF65-F5344CB8AC3E}">
+        <p14:creationId xmlns:p14="http://schemas.microsoft.com/office/powerpoint/2010/main" val="1422042557"/>
+      </p:ext>
+    </p:extLst>
+  </p:cSld>
+  <p:clrMapOvr>
+    <a:masterClrMapping/>
+  </p:clrMapOvr>
+</p:sld>
+</file>
+
+<file path=ppt/slides/slide11.xml><?xml version="1.0" encoding="utf-8"?>
+<p:sld xmlns:a="http://schemas.openxmlformats.org/drawingml/2006/main" xmlns:r="http://schemas.openxmlformats.org/officeDocument/2006/relationships" xmlns:p="http://schemas.openxmlformats.org/presentationml/2006/main">
+  <p:cSld>
+    <p:spTree>
+      <p:nvGrpSpPr>
+        <p:cNvPr id="1" name=""/>
+        <p:cNvGrpSpPr/>
+        <p:nvPr/>
+      </p:nvGrpSpPr>
+      <p:grpSpPr>
+        <a:xfrm>
+          <a:off x="0" y="0"/>
+          <a:ext cx="0" cy="0"/>
+          <a:chOff x="0" y="0"/>
+          <a:chExt cx="0" cy="0"/>
+        </a:xfrm>
+      </p:grpSpPr>
+      <p:sp>
+        <p:nvSpPr>
           <p:cNvPr id="13" name="四角形: 角を丸くする 12">
             <a:extLst>
               <a:ext uri="{FF2B5EF4-FFF2-40B4-BE49-F238E27FC236}">
@@ -4369,8 +4881,8 @@
           </a:p>
         </p:txBody>
       </p:sp>
-      <mc:AlternateContent xmlns:mc="http://schemas.openxmlformats.org/markup-compatibility/2006">
-        <mc:Choice xmlns:a14="http://schemas.microsoft.com/office/drawing/2010/main" Requires="a14">
+      <mc:AlternateContent xmlns:mc="http://schemas.openxmlformats.org/markup-compatibility/2006" xmlns:a14="http://schemas.microsoft.com/office/drawing/2010/main">
+        <mc:Choice Requires="a14">
           <p:sp>
             <p:nvSpPr>
               <p:cNvPr id="6" name="テキスト ボックス 5">
@@ -4460,7 +4972,7 @@
                     <m:sSub>
                       <m:sSubPr>
                         <m:ctrlPr>
-                          <a:rPr lang="en-US" altLang="ja-JP" sz="2400" b="0" i="0" smtClean="0">
+                          <a:rPr lang="en-US" altLang="ja-JP" sz="2400" b="0" i="1" smtClean="0">
                             <a:latin typeface="Cambria Math" panose="02040503050406030204" pitchFamily="18" charset="0"/>
                           </a:rPr>
                         </m:ctrlPr>
@@ -4625,7 +5137,7 @@
             </p:txBody>
           </p:sp>
         </mc:Choice>
-        <mc:Fallback>
+        <mc:Fallback xmlns="">
           <p:sp>
             <p:nvSpPr>
               <p:cNvPr id="6" name="テキスト ボックス 5">
@@ -4683,7 +5195,7 @@
 </p:sld>
 </file>
 
-<file path=ppt/slides/slide11.xml><?xml version="1.0" encoding="utf-8"?>
+<file path=ppt/slides/slide12.xml><?xml version="1.0" encoding="utf-8"?>
 <p:sld xmlns:a="http://schemas.openxmlformats.org/drawingml/2006/main" xmlns:r="http://schemas.openxmlformats.org/officeDocument/2006/relationships" xmlns:p="http://schemas.openxmlformats.org/presentationml/2006/main">
   <p:cSld>
     <p:spTree>
@@ -4772,8 +5284,8 @@
           </a:p>
         </p:txBody>
       </p:sp>
-      <mc:AlternateContent xmlns:mc="http://schemas.openxmlformats.org/markup-compatibility/2006">
-        <mc:Choice xmlns:a14="http://schemas.microsoft.com/office/drawing/2010/main" Requires="a14">
+      <mc:AlternateContent xmlns:mc="http://schemas.openxmlformats.org/markup-compatibility/2006" xmlns:a14="http://schemas.microsoft.com/office/drawing/2010/main">
+        <mc:Choice Requires="a14">
           <p:graphicFrame>
             <p:nvGraphicFramePr>
               <p:cNvPr id="2" name="表 2">
@@ -5143,7 +5655,7 @@
             </a:graphic>
           </p:graphicFrame>
         </mc:Choice>
-        <mc:Fallback>
+        <mc:Fallback xmlns="">
           <p:graphicFrame>
             <p:nvGraphicFramePr>
               <p:cNvPr id="2" name="表 2">
@@ -5499,7 +6011,7 @@
 </p:sld>
 </file>
 
-<file path=ppt/slides/slide12.xml><?xml version="1.0" encoding="utf-8"?>
+<file path=ppt/slides/slide13.xml><?xml version="1.0" encoding="utf-8"?>
 <p:sld xmlns:a="http://schemas.openxmlformats.org/drawingml/2006/main" xmlns:r="http://schemas.openxmlformats.org/officeDocument/2006/relationships" xmlns:p="http://schemas.openxmlformats.org/presentationml/2006/main">
   <p:cSld>
     <p:spTree>
@@ -5552,8 +6064,8 @@
           </a:p>
         </p:txBody>
       </p:sp>
-      <mc:AlternateContent xmlns:mc="http://schemas.openxmlformats.org/markup-compatibility/2006">
-        <mc:Choice xmlns:a14="http://schemas.microsoft.com/office/drawing/2010/main" Requires="a14">
+      <mc:AlternateContent xmlns:mc="http://schemas.openxmlformats.org/markup-compatibility/2006" xmlns:a14="http://schemas.microsoft.com/office/drawing/2010/main">
+        <mc:Choice Requires="a14">
           <p:sp>
             <p:nvSpPr>
               <p:cNvPr id="6" name="テキスト ボックス 5">
@@ -5919,18 +6431,12 @@
                       <a:rPr lang="en-US" altLang="ja-JP" sz="2400" b="0" i="1" smtClean="0">
                         <a:latin typeface="Cambria Math" panose="02040503050406030204" pitchFamily="18" charset="0"/>
                       </a:rPr>
-                      <m:t>=</m:t>
-                    </m:r>
-                    <m:r>
-                      <a:rPr lang="en-US" altLang="ja-JP" sz="2400" b="0" i="1" smtClean="0">
-                        <a:latin typeface="Cambria Math" panose="02040503050406030204" pitchFamily="18" charset="0"/>
-                      </a:rPr>
-                      <m:t>0.74</m:t>
+                      <m:t>=0.74</m:t>
                     </m:r>
                     <m:d>
                       <m:dPr>
                         <m:ctrlPr>
-                          <a:rPr lang="en-US" altLang="ja-JP" sz="2400" b="0" i="0" smtClean="0">
+                          <a:rPr lang="en-US" altLang="ja-JP" sz="2400" b="0" i="1" smtClean="0">
                             <a:latin typeface="Cambria Math" panose="02040503050406030204" pitchFamily="18" charset="0"/>
                           </a:rPr>
                         </m:ctrlPr>
@@ -5996,7 +6502,7 @@
             </p:txBody>
           </p:sp>
         </mc:Choice>
-        <mc:Fallback>
+        <mc:Fallback xmlns="">
           <p:sp>
             <p:nvSpPr>
               <p:cNvPr id="6" name="テキスト ボックス 5">
@@ -6054,7 +6560,7 @@
 </p:sld>
 </file>
 
-<file path=ppt/slides/slide13.xml><?xml version="1.0" encoding="utf-8"?>
+<file path=ppt/slides/slide14.xml><?xml version="1.0" encoding="utf-8"?>
 <p:sld xmlns:a="http://schemas.openxmlformats.org/drawingml/2006/main" xmlns:r="http://schemas.openxmlformats.org/officeDocument/2006/relationships" xmlns:p="http://schemas.openxmlformats.org/presentationml/2006/main">
   <p:cSld>
     <p:spTree>
@@ -6107,8 +6613,8 @@
           </a:p>
         </p:txBody>
       </p:sp>
-      <mc:AlternateContent xmlns:mc="http://schemas.openxmlformats.org/markup-compatibility/2006">
-        <mc:Choice xmlns:a14="http://schemas.microsoft.com/office/drawing/2010/main" Requires="a14">
+      <mc:AlternateContent xmlns:mc="http://schemas.openxmlformats.org/markup-compatibility/2006" xmlns:a14="http://schemas.microsoft.com/office/drawing/2010/main">
+        <mc:Choice Requires="a14">
           <p:sp>
             <p:nvSpPr>
               <p:cNvPr id="6" name="テキスト ボックス 5">
@@ -6436,18 +6942,12 @@
                       <a:rPr lang="en-US" altLang="ja-JP" sz="2400" b="0" i="1" smtClean="0">
                         <a:latin typeface="Cambria Math" panose="02040503050406030204" pitchFamily="18" charset="0"/>
                       </a:rPr>
-                      <m:t>=</m:t>
-                    </m:r>
-                    <m:r>
-                      <a:rPr lang="en-US" altLang="ja-JP" sz="2400" b="0" i="1" smtClean="0">
-                        <a:latin typeface="Cambria Math" panose="02040503050406030204" pitchFamily="18" charset="0"/>
-                      </a:rPr>
-                      <m:t>0.57</m:t>
+                      <m:t>=0.57</m:t>
                     </m:r>
                     <m:d>
                       <m:dPr>
                         <m:ctrlPr>
-                          <a:rPr lang="en-US" altLang="ja-JP" sz="2400" b="0" i="0" smtClean="0">
+                          <a:rPr lang="en-US" altLang="ja-JP" sz="2400" b="0" i="1" smtClean="0">
                             <a:latin typeface="Cambria Math" panose="02040503050406030204" pitchFamily="18" charset="0"/>
                           </a:rPr>
                         </m:ctrlPr>
@@ -6513,7 +7013,7 @@
             </p:txBody>
           </p:sp>
         </mc:Choice>
-        <mc:Fallback>
+        <mc:Fallback xmlns="">
           <p:sp>
             <p:nvSpPr>
               <p:cNvPr id="6" name="テキスト ボックス 5">
@@ -6571,7 +7071,7 @@
 </p:sld>
 </file>
 
-<file path=ppt/slides/slide14.xml><?xml version="1.0" encoding="utf-8"?>
+<file path=ppt/slides/slide15.xml><?xml version="1.0" encoding="utf-8"?>
 <p:sld xmlns:a="http://schemas.openxmlformats.org/drawingml/2006/main" xmlns:r="http://schemas.openxmlformats.org/officeDocument/2006/relationships" xmlns:p="http://schemas.openxmlformats.org/presentationml/2006/main">
   <p:cSld>
     <p:spTree>
@@ -6624,8 +7124,8 @@
           </a:p>
         </p:txBody>
       </p:sp>
-      <mc:AlternateContent xmlns:mc="http://schemas.openxmlformats.org/markup-compatibility/2006">
-        <mc:Choice xmlns:a14="http://schemas.microsoft.com/office/drawing/2010/main" Requires="a14">
+      <mc:AlternateContent xmlns:mc="http://schemas.openxmlformats.org/markup-compatibility/2006" xmlns:a14="http://schemas.microsoft.com/office/drawing/2010/main">
+        <mc:Choice Requires="a14">
           <p:sp>
             <p:nvSpPr>
               <p:cNvPr id="6" name="テキスト ボックス 5">
@@ -6797,7 +7297,7 @@
             </p:txBody>
           </p:sp>
         </mc:Choice>
-        <mc:Fallback>
+        <mc:Fallback xmlns="">
           <p:sp>
             <p:nvSpPr>
               <p:cNvPr id="6" name="テキスト ボックス 5">
@@ -7519,7 +8019,7 @@
         <p:spPr>
           <a:xfrm>
             <a:off x="567542" y="1216429"/>
-            <a:ext cx="8186857" cy="1938992"/>
+            <a:ext cx="7571303" cy="1569660"/>
           </a:xfrm>
           <a:prstGeom prst="rect">
             <a:avLst/>
@@ -7534,15 +8034,11 @@
           <a:p>
             <a:r>
               <a:rPr lang="ja-JP" altLang="en-US" sz="2400" dirty="0"/>
-              <a:t>このように滑り方が素材によって違うのは、</a:t>
+              <a:t>滑る力が存在するのに滑らない場合があるのは、</a:t>
             </a:r>
             <a:endParaRPr lang="en-US" altLang="ja-JP" sz="2400" dirty="0"/>
           </a:p>
           <a:p>
-            <a:r>
-              <a:rPr lang="ja-JP" altLang="en-US" sz="2400" dirty="0"/>
-              <a:t>滑る力は</a:t>
-            </a:r>
             <a:r>
               <a:rPr lang="ja-JP" altLang="en-US" sz="2400" b="1" dirty="0">
                 <a:solidFill>
@@ -7553,7 +8049,7 @@
             </a:r>
             <a:r>
               <a:rPr lang="ja-JP" altLang="en-US" sz="2400" dirty="0"/>
-              <a:t>によって抵抗されているからになります。</a:t>
+              <a:t>により抵抗されているからです。</a:t>
             </a:r>
             <a:endParaRPr lang="en-US" altLang="ja-JP" sz="2400" dirty="0"/>
           </a:p>
@@ -7563,16 +8059,21 @@
           <a:p>
             <a:r>
               <a:rPr lang="ja-JP" altLang="en-US" sz="2400" dirty="0"/>
-              <a:t>摩擦力が強くなる素材の組み合わせほど滑りにくく、</a:t>
-            </a:r>
-            <a:endParaRPr lang="en-US" altLang="ja-JP" sz="2400" dirty="0"/>
-          </a:p>
-          <a:p>
-            <a:r>
-              <a:rPr lang="ja-JP" altLang="en-US" sz="2400" dirty="0"/>
-              <a:t>弱い素材の組み合わせほど滑りやすいです。</a:t>
-            </a:r>
-            <a:endParaRPr lang="en-US" altLang="ja-JP" sz="2400" dirty="0"/>
+              <a:t>そして摩擦力は、</a:t>
+            </a:r>
+            <a:r>
+              <a:rPr lang="ja-JP" altLang="en-US" sz="2400" b="1" dirty="0">
+                <a:solidFill>
+                  <a:srgbClr val="FF0000"/>
+                </a:solidFill>
+              </a:rPr>
+              <a:t>素材によって大きさが変わります。</a:t>
+            </a:r>
+            <a:endParaRPr lang="en-US" altLang="ja-JP" sz="2400" b="1" dirty="0">
+              <a:solidFill>
+                <a:srgbClr val="FF0000"/>
+              </a:solidFill>
+            </a:endParaRPr>
           </a:p>
         </p:txBody>
       </p:sp>
@@ -7900,6 +8401,272 @@
             <a:r>
               <a:rPr lang="ja-JP" altLang="en-US" sz="2400" dirty="0"/>
               <a:t>ほんの少しだけ傾けても滑り出しはしないと思います。</a:t>
+            </a:r>
+            <a:endParaRPr lang="en-US" altLang="ja-JP" sz="2400" dirty="0"/>
+          </a:p>
+        </p:txBody>
+      </p:sp>
+      <p:grpSp>
+        <p:nvGrpSpPr>
+          <p:cNvPr id="11" name="グループ化 10">
+            <a:extLst>
+              <a:ext uri="{FF2B5EF4-FFF2-40B4-BE49-F238E27FC236}">
+                <a16:creationId xmlns:a16="http://schemas.microsoft.com/office/drawing/2014/main" id="{80D16E17-1560-44BA-9E5E-E771DEC8005D}"/>
+              </a:ext>
+            </a:extLst>
+          </p:cNvPr>
+          <p:cNvGrpSpPr/>
+          <p:nvPr/>
+        </p:nvGrpSpPr>
+        <p:grpSpPr>
+          <a:xfrm>
+            <a:off x="567542" y="3710147"/>
+            <a:ext cx="3638550" cy="773445"/>
+            <a:chOff x="2114550" y="4805030"/>
+            <a:chExt cx="3638550" cy="773445"/>
+          </a:xfrm>
+        </p:grpSpPr>
+        <p:cxnSp>
+          <p:nvCxnSpPr>
+            <p:cNvPr id="5" name="直線コネクタ 4">
+              <a:extLst>
+                <a:ext uri="{FF2B5EF4-FFF2-40B4-BE49-F238E27FC236}">
+                  <a16:creationId xmlns:a16="http://schemas.microsoft.com/office/drawing/2014/main" id="{88D49477-76D4-45C2-89E6-A89B9813CE3B}"/>
+                </a:ext>
+              </a:extLst>
+            </p:cNvPr>
+            <p:cNvCxnSpPr>
+              <a:cxnSpLocks/>
+            </p:cNvCxnSpPr>
+            <p:nvPr/>
+          </p:nvCxnSpPr>
+          <p:spPr>
+            <a:xfrm flipV="1">
+              <a:off x="2114550" y="5403851"/>
+              <a:ext cx="3638550" cy="174624"/>
+            </a:xfrm>
+            <a:prstGeom prst="line">
+              <a:avLst/>
+            </a:prstGeom>
+            <a:ln w="38100">
+              <a:solidFill>
+                <a:schemeClr val="bg1">
+                  <a:lumMod val="50000"/>
+                </a:schemeClr>
+              </a:solidFill>
+            </a:ln>
+          </p:spPr>
+          <p:style>
+            <a:lnRef idx="1">
+              <a:schemeClr val="accent1"/>
+            </a:lnRef>
+            <a:fillRef idx="0">
+              <a:schemeClr val="accent1"/>
+            </a:fillRef>
+            <a:effectRef idx="0">
+              <a:schemeClr val="accent1"/>
+            </a:effectRef>
+            <a:fontRef idx="minor">
+              <a:schemeClr val="tx1"/>
+            </a:fontRef>
+          </p:style>
+        </p:cxnSp>
+        <p:sp>
+          <p:nvSpPr>
+            <p:cNvPr id="8" name="台形 7">
+              <a:extLst>
+                <a:ext uri="{FF2B5EF4-FFF2-40B4-BE49-F238E27FC236}">
+                  <a16:creationId xmlns:a16="http://schemas.microsoft.com/office/drawing/2014/main" id="{55E80D41-E85A-436E-9CBF-7E904F4495E5}"/>
+                </a:ext>
+              </a:extLst>
+            </p:cNvPr>
+            <p:cNvSpPr/>
+            <p:nvPr/>
+          </p:nvSpPr>
+          <p:spPr>
+            <a:xfrm rot="21422328">
+              <a:off x="3158067" y="4805030"/>
+              <a:ext cx="1109133" cy="685800"/>
+            </a:xfrm>
+            <a:prstGeom prst="trapezoid">
+              <a:avLst/>
+            </a:prstGeom>
+          </p:spPr>
+          <p:style>
+            <a:lnRef idx="2">
+              <a:schemeClr val="accent3">
+                <a:shade val="50000"/>
+              </a:schemeClr>
+            </a:lnRef>
+            <a:fillRef idx="1">
+              <a:schemeClr val="accent3"/>
+            </a:fillRef>
+            <a:effectRef idx="0">
+              <a:schemeClr val="accent3"/>
+            </a:effectRef>
+            <a:fontRef idx="minor">
+              <a:schemeClr val="lt1"/>
+            </a:fontRef>
+          </p:style>
+          <p:txBody>
+            <a:bodyPr rtlCol="0" anchor="ctr"/>
+            <a:lstStyle/>
+            <a:p>
+              <a:pPr algn="ctr"/>
+              <a:r>
+                <a:rPr kumimoji="1" lang="ja-JP" altLang="en-US" b="1" dirty="0"/>
+                <a:t>重り</a:t>
+              </a:r>
+            </a:p>
+          </p:txBody>
+        </p:sp>
+      </p:grpSp>
+    </p:spTree>
+    <p:extLst>
+      <p:ext uri="{BB962C8B-B14F-4D97-AF65-F5344CB8AC3E}">
+        <p14:creationId xmlns:p14="http://schemas.microsoft.com/office/powerpoint/2010/main" val="1534983954"/>
+      </p:ext>
+    </p:extLst>
+  </p:cSld>
+  <p:clrMapOvr>
+    <a:masterClrMapping/>
+  </p:clrMapOvr>
+</p:sld>
+</file>
+
+<file path=ppt/slides/slide7.xml><?xml version="1.0" encoding="utf-8"?>
+<p:sld xmlns:a="http://schemas.openxmlformats.org/drawingml/2006/main" xmlns:r="http://schemas.openxmlformats.org/officeDocument/2006/relationships" xmlns:p="http://schemas.openxmlformats.org/presentationml/2006/main">
+  <p:cSld>
+    <p:spTree>
+      <p:nvGrpSpPr>
+        <p:cNvPr id="1" name=""/>
+        <p:cNvGrpSpPr/>
+        <p:nvPr/>
+      </p:nvGrpSpPr>
+      <p:grpSpPr>
+        <a:xfrm>
+          <a:off x="0" y="0"/>
+          <a:ext cx="0" cy="0"/>
+          <a:chOff x="0" y="0"/>
+          <a:chExt cx="0" cy="0"/>
+        </a:xfrm>
+      </p:grpSpPr>
+      <p:sp>
+        <p:nvSpPr>
+          <p:cNvPr id="4" name="テキスト ボックス 3">
+            <a:extLst>
+              <a:ext uri="{FF2B5EF4-FFF2-40B4-BE49-F238E27FC236}">
+                <a16:creationId xmlns:a16="http://schemas.microsoft.com/office/drawing/2014/main" id="{5A13BF46-B8C5-48AA-8308-C9ECFF431A18}"/>
+              </a:ext>
+            </a:extLst>
+          </p:cNvPr>
+          <p:cNvSpPr txBox="1"/>
+          <p:nvPr/>
+        </p:nvSpPr>
+        <p:spPr>
+          <a:xfrm>
+            <a:off x="567542" y="491954"/>
+            <a:ext cx="1415772" cy="584775"/>
+          </a:xfrm>
+          <a:prstGeom prst="rect">
+            <a:avLst/>
+          </a:prstGeom>
+          <a:noFill/>
+        </p:spPr>
+        <p:txBody>
+          <a:bodyPr wrap="none" rtlCol="0">
+            <a:spAutoFit/>
+          </a:bodyPr>
+          <a:lstStyle/>
+          <a:p>
+            <a:r>
+              <a:rPr kumimoji="1" lang="ja-JP" altLang="en-US" sz="3200" b="1" u="sng" dirty="0"/>
+              <a:t>摩擦力</a:t>
+            </a:r>
+            <a:endParaRPr kumimoji="1" lang="en-US" altLang="ja-JP" sz="3200" b="1" u="sng" dirty="0"/>
+          </a:p>
+        </p:txBody>
+      </p:sp>
+      <p:sp>
+        <p:nvSpPr>
+          <p:cNvPr id="6" name="テキスト ボックス 5">
+            <a:extLst>
+              <a:ext uri="{FF2B5EF4-FFF2-40B4-BE49-F238E27FC236}">
+                <a16:creationId xmlns:a16="http://schemas.microsoft.com/office/drawing/2014/main" id="{55830AD6-028B-4C4E-80BF-B70DFC1C3A46}"/>
+              </a:ext>
+            </a:extLst>
+          </p:cNvPr>
+          <p:cNvSpPr txBox="1"/>
+          <p:nvPr/>
+        </p:nvSpPr>
+        <p:spPr>
+          <a:xfrm>
+            <a:off x="567542" y="1216429"/>
+            <a:ext cx="9110186" cy="1569660"/>
+          </a:xfrm>
+          <a:prstGeom prst="rect">
+            <a:avLst/>
+          </a:prstGeom>
+          <a:noFill/>
+        </p:spPr>
+        <p:txBody>
+          <a:bodyPr wrap="none" rtlCol="0">
+            <a:spAutoFit/>
+          </a:bodyPr>
+          <a:lstStyle/>
+          <a:p>
+            <a:r>
+              <a:rPr lang="ja-JP" altLang="en-US" sz="2400" dirty="0"/>
+              <a:t>ある程度傾けるまでは滑りません。</a:t>
+            </a:r>
+            <a:endParaRPr lang="en-US" altLang="ja-JP" sz="2400" dirty="0"/>
+          </a:p>
+          <a:p>
+            <a:r>
+              <a:rPr lang="ja-JP" altLang="en-US" sz="2400" dirty="0"/>
+              <a:t>これは</a:t>
+            </a:r>
+            <a:r>
+              <a:rPr lang="ja-JP" altLang="en-US" sz="2400" b="1" dirty="0">
+                <a:solidFill>
+                  <a:srgbClr val="FF0000"/>
+                </a:solidFill>
+              </a:rPr>
+              <a:t>滑る力と静止摩擦力が等しい状態</a:t>
+            </a:r>
+            <a:r>
+              <a:rPr lang="ja-JP" altLang="en-US" sz="2400" dirty="0"/>
+              <a:t>が続いているからです。</a:t>
+            </a:r>
+            <a:endParaRPr lang="en-US" altLang="ja-JP" sz="2400" dirty="0"/>
+          </a:p>
+          <a:p>
+            <a:r>
+              <a:rPr lang="ja-JP" altLang="en-US" sz="2400" b="1" dirty="0">
+                <a:solidFill>
+                  <a:srgbClr val="FF0000"/>
+                </a:solidFill>
+              </a:rPr>
+              <a:t>傾けると滑る力が強く</a:t>
+            </a:r>
+            <a:r>
+              <a:rPr lang="ja-JP" altLang="en-US" sz="2400" dirty="0"/>
+              <a:t>なりますが、</a:t>
+            </a:r>
+            <a:endParaRPr lang="en-US" altLang="ja-JP" sz="2400" dirty="0"/>
+          </a:p>
+          <a:p>
+            <a:r>
+              <a:rPr lang="ja-JP" altLang="en-US" sz="2400" b="1" dirty="0">
+                <a:solidFill>
+                  <a:srgbClr val="FF0000"/>
+                </a:solidFill>
+              </a:rPr>
+              <a:t>滑らないということは静止摩擦力も強く</a:t>
+            </a:r>
+            <a:r>
+              <a:rPr lang="ja-JP" altLang="en-US" sz="2400" dirty="0"/>
+              <a:t>なります。</a:t>
             </a:r>
             <a:endParaRPr lang="en-US" altLang="ja-JP" sz="2400" dirty="0"/>
           </a:p>
@@ -8022,10 +8789,10 @@
       </p:grpSp>
       <p:sp>
         <p:nvSpPr>
-          <p:cNvPr id="13" name="テキスト ボックス 12">
-            <a:extLst>
-              <a:ext uri="{FF2B5EF4-FFF2-40B4-BE49-F238E27FC236}">
-                <a16:creationId xmlns:a16="http://schemas.microsoft.com/office/drawing/2014/main" id="{CBA52111-0895-44E0-8F9A-DEAEFD9B83C1}"/>
+          <p:cNvPr id="9" name="テキスト ボックス 8">
+            <a:extLst>
+              <a:ext uri="{FF2B5EF4-FFF2-40B4-BE49-F238E27FC236}">
+                <a16:creationId xmlns:a16="http://schemas.microsoft.com/office/drawing/2014/main" id="{99F981AA-7C78-47D6-A67D-0CF78B7E6E4F}"/>
               </a:ext>
             </a:extLst>
           </p:cNvPr>
@@ -8034,8 +8801,8 @@
         </p:nvSpPr>
         <p:spPr>
           <a:xfrm>
-            <a:off x="567542" y="5051150"/>
-            <a:ext cx="11264622" cy="461665"/>
+            <a:off x="1217266" y="4904506"/>
+            <a:ext cx="2339102" cy="830997"/>
           </a:xfrm>
           <a:prstGeom prst="rect">
             <a:avLst/>
@@ -8049,21 +8816,234 @@
           <a:lstStyle/>
           <a:p>
             <a:r>
-              <a:rPr lang="en-US" altLang="ja-JP" sz="2400" dirty="0"/>
+              <a:rPr lang="ja-JP" altLang="en-US" sz="2400" dirty="0"/>
+              <a:t>滑る力：弱</a:t>
+            </a:r>
+            <a:endParaRPr lang="en-US" altLang="ja-JP" sz="2400" dirty="0"/>
+          </a:p>
+          <a:p>
+            <a:r>
+              <a:rPr lang="ja-JP" altLang="en-US" sz="2400" dirty="0"/>
+              <a:t>静止摩擦力：弱</a:t>
+            </a:r>
+            <a:endParaRPr lang="en-US" altLang="ja-JP" sz="2400" dirty="0"/>
+          </a:p>
+        </p:txBody>
+      </p:sp>
+      <p:grpSp>
+        <p:nvGrpSpPr>
+          <p:cNvPr id="10" name="グループ化 9">
+            <a:extLst>
+              <a:ext uri="{FF2B5EF4-FFF2-40B4-BE49-F238E27FC236}">
+                <a16:creationId xmlns:a16="http://schemas.microsoft.com/office/drawing/2014/main" id="{9B220131-12B0-41BA-8490-B72E8FE7D94F}"/>
+              </a:ext>
+            </a:extLst>
+          </p:cNvPr>
+          <p:cNvGrpSpPr/>
+          <p:nvPr/>
+        </p:nvGrpSpPr>
+        <p:grpSpPr>
+          <a:xfrm rot="20970380">
+            <a:off x="5842276" y="3650693"/>
+            <a:ext cx="3638550" cy="773445"/>
+            <a:chOff x="2114550" y="4805030"/>
+            <a:chExt cx="3638550" cy="773445"/>
+          </a:xfrm>
+        </p:grpSpPr>
+        <p:cxnSp>
+          <p:nvCxnSpPr>
+            <p:cNvPr id="12" name="直線コネクタ 11">
+              <a:extLst>
+                <a:ext uri="{FF2B5EF4-FFF2-40B4-BE49-F238E27FC236}">
+                  <a16:creationId xmlns:a16="http://schemas.microsoft.com/office/drawing/2014/main" id="{D2B73053-DF4E-4615-92EB-AB46487C7DB1}"/>
+                </a:ext>
+              </a:extLst>
+            </p:cNvPr>
+            <p:cNvCxnSpPr>
+              <a:cxnSpLocks/>
+            </p:cNvCxnSpPr>
+            <p:nvPr/>
+          </p:nvCxnSpPr>
+          <p:spPr>
+            <a:xfrm flipV="1">
+              <a:off x="2114550" y="5403851"/>
+              <a:ext cx="3638550" cy="174624"/>
+            </a:xfrm>
+            <a:prstGeom prst="line">
+              <a:avLst/>
+            </a:prstGeom>
+            <a:ln w="38100">
+              <a:solidFill>
+                <a:schemeClr val="bg1">
+                  <a:lumMod val="50000"/>
+                </a:schemeClr>
+              </a:solidFill>
+            </a:ln>
+          </p:spPr>
+          <p:style>
+            <a:lnRef idx="1">
+              <a:schemeClr val="accent1"/>
+            </a:lnRef>
+            <a:fillRef idx="0">
+              <a:schemeClr val="accent1"/>
+            </a:fillRef>
+            <a:effectRef idx="0">
+              <a:schemeClr val="accent1"/>
+            </a:effectRef>
+            <a:fontRef idx="minor">
+              <a:schemeClr val="tx1"/>
+            </a:fontRef>
+          </p:style>
+        </p:cxnSp>
+        <p:sp>
+          <p:nvSpPr>
+            <p:cNvPr id="13" name="台形 12">
+              <a:extLst>
+                <a:ext uri="{FF2B5EF4-FFF2-40B4-BE49-F238E27FC236}">
+                  <a16:creationId xmlns:a16="http://schemas.microsoft.com/office/drawing/2014/main" id="{CD069B56-DE43-4C6D-BA72-2453DEF64B9A}"/>
+                </a:ext>
+              </a:extLst>
+            </p:cNvPr>
+            <p:cNvSpPr/>
+            <p:nvPr/>
+          </p:nvSpPr>
+          <p:spPr>
+            <a:xfrm rot="21422328">
+              <a:off x="3158067" y="4805030"/>
+              <a:ext cx="1109133" cy="685800"/>
+            </a:xfrm>
+            <a:prstGeom prst="trapezoid">
+              <a:avLst/>
+            </a:prstGeom>
+          </p:spPr>
+          <p:style>
+            <a:lnRef idx="2">
+              <a:schemeClr val="accent3">
+                <a:shade val="50000"/>
+              </a:schemeClr>
+            </a:lnRef>
+            <a:fillRef idx="1">
+              <a:schemeClr val="accent3"/>
+            </a:fillRef>
+            <a:effectRef idx="0">
+              <a:schemeClr val="accent3"/>
+            </a:effectRef>
+            <a:fontRef idx="minor">
+              <a:schemeClr val="lt1"/>
+            </a:fontRef>
+          </p:style>
+          <p:txBody>
+            <a:bodyPr rtlCol="0" anchor="ctr"/>
+            <a:lstStyle/>
+            <a:p>
+              <a:pPr algn="ctr"/>
+              <a:r>
+                <a:rPr kumimoji="1" lang="ja-JP" altLang="en-US" b="1" dirty="0"/>
+                <a:t>重り</a:t>
+              </a:r>
+            </a:p>
+          </p:txBody>
+        </p:sp>
+      </p:grpSp>
+      <p:sp>
+        <p:nvSpPr>
+          <p:cNvPr id="14" name="テキスト ボックス 13">
+            <a:extLst>
+              <a:ext uri="{FF2B5EF4-FFF2-40B4-BE49-F238E27FC236}">
+                <a16:creationId xmlns:a16="http://schemas.microsoft.com/office/drawing/2014/main" id="{93BB7161-2782-4310-9C5B-AEE3D873AB71}"/>
+              </a:ext>
+            </a:extLst>
+          </p:cNvPr>
+          <p:cNvSpPr txBox="1"/>
+          <p:nvPr/>
+        </p:nvSpPr>
+        <p:spPr>
+          <a:xfrm>
+            <a:off x="6644399" y="4904506"/>
+            <a:ext cx="2339102" cy="830997"/>
+          </a:xfrm>
+          <a:prstGeom prst="rect">
+            <a:avLst/>
+          </a:prstGeom>
+          <a:noFill/>
+        </p:spPr>
+        <p:txBody>
+          <a:bodyPr wrap="none" rtlCol="0">
+            <a:spAutoFit/>
+          </a:bodyPr>
+          <a:lstStyle/>
+          <a:p>
+            <a:r>
+              <a:rPr lang="ja-JP" altLang="en-US" sz="2400" dirty="0"/>
+              <a:t>滑る力：強</a:t>
+            </a:r>
+            <a:endParaRPr lang="en-US" altLang="ja-JP" sz="2400" dirty="0"/>
+          </a:p>
+          <a:p>
+            <a:r>
+              <a:rPr lang="ja-JP" altLang="en-US" sz="2400" dirty="0"/>
+              <a:t>静止摩擦力：強</a:t>
+            </a:r>
+            <a:endParaRPr lang="en-US" altLang="ja-JP" sz="2400" dirty="0"/>
+          </a:p>
+        </p:txBody>
+      </p:sp>
+      <p:sp>
+        <p:nvSpPr>
+          <p:cNvPr id="15" name="テキスト ボックス 14">
+            <a:extLst>
+              <a:ext uri="{FF2B5EF4-FFF2-40B4-BE49-F238E27FC236}">
+                <a16:creationId xmlns:a16="http://schemas.microsoft.com/office/drawing/2014/main" id="{BCED2973-D602-4253-AD0A-1466E6AA42E8}"/>
+              </a:ext>
+            </a:extLst>
+          </p:cNvPr>
+          <p:cNvSpPr txBox="1"/>
+          <p:nvPr/>
+        </p:nvSpPr>
+        <p:spPr>
+          <a:xfrm>
+            <a:off x="567542" y="6041055"/>
+            <a:ext cx="6955750" cy="461665"/>
+          </a:xfrm>
+          <a:prstGeom prst="rect">
+            <a:avLst/>
+          </a:prstGeom>
+          <a:noFill/>
+        </p:spPr>
+        <p:txBody>
+          <a:bodyPr wrap="none" rtlCol="0">
+            <a:spAutoFit/>
+          </a:bodyPr>
+          <a:lstStyle/>
+          <a:p>
+            <a:r>
+              <a:rPr lang="en-US" altLang="ja-JP" sz="2400" b="1" dirty="0">
+                <a:solidFill>
+                  <a:srgbClr val="FF0000"/>
+                </a:solidFill>
+              </a:rPr>
               <a:t>※</a:t>
             </a:r>
             <a:r>
-              <a:rPr lang="ja-JP" altLang="en-US" sz="2400" dirty="0"/>
-              <a:t>斜面を傾けるほど滑る力は強くなるので、静止摩擦力も同時に強くなります。</a:t>
-            </a:r>
-            <a:endParaRPr lang="en-US" altLang="ja-JP" sz="2400" dirty="0"/>
+              <a:rPr lang="ja-JP" altLang="en-US" sz="2400" b="1" dirty="0">
+                <a:solidFill>
+                  <a:srgbClr val="FF0000"/>
+                </a:solidFill>
+              </a:rPr>
+              <a:t>滑らない間は、滑る力＝静止摩擦力となります</a:t>
+            </a:r>
+            <a:endParaRPr lang="en-US" altLang="ja-JP" sz="2400" b="1" dirty="0">
+              <a:solidFill>
+                <a:srgbClr val="FF0000"/>
+              </a:solidFill>
+            </a:endParaRPr>
           </a:p>
         </p:txBody>
       </p:sp>
     </p:spTree>
     <p:extLst>
       <p:ext uri="{BB962C8B-B14F-4D97-AF65-F5344CB8AC3E}">
-        <p14:creationId xmlns:p14="http://schemas.microsoft.com/office/powerpoint/2010/main" val="1534983954"/>
+        <p14:creationId xmlns:p14="http://schemas.microsoft.com/office/powerpoint/2010/main" val="1256445540"/>
       </p:ext>
     </p:extLst>
   </p:cSld>
@@ -8073,7 +9053,7 @@
 </p:sld>
 </file>
 
-<file path=ppt/slides/slide7.xml><?xml version="1.0" encoding="utf-8"?>
+<file path=ppt/slides/slide8.xml><?xml version="1.0" encoding="utf-8"?>
 <p:sld xmlns:a="http://schemas.openxmlformats.org/drawingml/2006/main" xmlns:r="http://schemas.openxmlformats.org/officeDocument/2006/relationships" xmlns:p="http://schemas.openxmlformats.org/presentationml/2006/main">
   <p:cSld>
     <p:spTree>
@@ -8504,7 +9484,7 @@
 </p:sld>
 </file>
 
-<file path=ppt/slides/slide8.xml><?xml version="1.0" encoding="utf-8"?>
+<file path=ppt/slides/slide9.xml><?xml version="1.0" encoding="utf-8"?>
 <p:sld xmlns:a="http://schemas.openxmlformats.org/drawingml/2006/main" xmlns:r="http://schemas.openxmlformats.org/officeDocument/2006/relationships" xmlns:p="http://schemas.openxmlformats.org/presentationml/2006/main">
   <p:cSld>
     <p:spTree>
@@ -8611,8 +9591,8 @@
           </a:p>
         </p:txBody>
       </p:sp>
-      <mc:AlternateContent xmlns:mc="http://schemas.openxmlformats.org/markup-compatibility/2006">
-        <mc:Choice xmlns:a14="http://schemas.microsoft.com/office/drawing/2010/main" Requires="a14">
+      <mc:AlternateContent xmlns:mc="http://schemas.openxmlformats.org/markup-compatibility/2006" xmlns:a14="http://schemas.microsoft.com/office/drawing/2010/main">
+        <mc:Choice Requires="a14">
           <p:sp>
             <p:nvSpPr>
               <p:cNvPr id="6" name="テキスト ボックス 5">
@@ -8702,7 +9682,7 @@
                     <m:sSub>
                       <m:sSubPr>
                         <m:ctrlPr>
-                          <a:rPr lang="en-US" altLang="ja-JP" sz="2400" b="0" i="0" smtClean="0">
+                          <a:rPr lang="en-US" altLang="ja-JP" sz="2400" b="0" i="1" smtClean="0">
                             <a:latin typeface="Cambria Math" panose="02040503050406030204" pitchFamily="18" charset="0"/>
                           </a:rPr>
                         </m:ctrlPr>
@@ -8867,7 +9847,7 @@
             </p:txBody>
           </p:sp>
         </mc:Choice>
-        <mc:Fallback>
+        <mc:Fallback xmlns="">
           <p:sp>
             <p:nvSpPr>
               <p:cNvPr id="6" name="テキスト ボックス 5">
@@ -8916,517 +9896,6 @@
     <p:extLst>
       <p:ext uri="{BB962C8B-B14F-4D97-AF65-F5344CB8AC3E}">
         <p14:creationId xmlns:p14="http://schemas.microsoft.com/office/powerpoint/2010/main" val="618440067"/>
-      </p:ext>
-    </p:extLst>
-  </p:cSld>
-  <p:clrMapOvr>
-    <a:masterClrMapping/>
-  </p:clrMapOvr>
-</p:sld>
-</file>
-
-<file path=ppt/slides/slide9.xml><?xml version="1.0" encoding="utf-8"?>
-<p:sld xmlns:a="http://schemas.openxmlformats.org/drawingml/2006/main" xmlns:r="http://schemas.openxmlformats.org/officeDocument/2006/relationships" xmlns:p="http://schemas.openxmlformats.org/presentationml/2006/main">
-  <p:cSld>
-    <p:spTree>
-      <p:nvGrpSpPr>
-        <p:cNvPr id="1" name=""/>
-        <p:cNvGrpSpPr/>
-        <p:nvPr/>
-      </p:nvGrpSpPr>
-      <p:grpSpPr>
-        <a:xfrm>
-          <a:off x="0" y="0"/>
-          <a:ext cx="0" cy="0"/>
-          <a:chOff x="0" y="0"/>
-          <a:chExt cx="0" cy="0"/>
-        </a:xfrm>
-      </p:grpSpPr>
-      <p:sp>
-        <p:nvSpPr>
-          <p:cNvPr id="4" name="テキスト ボックス 3">
-            <a:extLst>
-              <a:ext uri="{FF2B5EF4-FFF2-40B4-BE49-F238E27FC236}">
-                <a16:creationId xmlns:a16="http://schemas.microsoft.com/office/drawing/2014/main" id="{5A13BF46-B8C5-48AA-8308-C9ECFF431A18}"/>
-              </a:ext>
-            </a:extLst>
-          </p:cNvPr>
-          <p:cNvSpPr txBox="1"/>
-          <p:nvPr/>
-        </p:nvSpPr>
-        <p:spPr>
-          <a:xfrm>
-            <a:off x="567542" y="491954"/>
-            <a:ext cx="1415772" cy="584775"/>
-          </a:xfrm>
-          <a:prstGeom prst="rect">
-            <a:avLst/>
-          </a:prstGeom>
-          <a:noFill/>
-        </p:spPr>
-        <p:txBody>
-          <a:bodyPr wrap="none" rtlCol="0">
-            <a:spAutoFit/>
-          </a:bodyPr>
-          <a:lstStyle/>
-          <a:p>
-            <a:r>
-              <a:rPr kumimoji="1" lang="ja-JP" altLang="en-US" sz="3200" b="1" u="sng" dirty="0"/>
-              <a:t>摩擦力</a:t>
-            </a:r>
-            <a:endParaRPr kumimoji="1" lang="en-US" altLang="ja-JP" sz="3200" b="1" u="sng" dirty="0"/>
-          </a:p>
-        </p:txBody>
-      </p:sp>
-      <p:sp>
-        <p:nvSpPr>
-          <p:cNvPr id="6" name="テキスト ボックス 5">
-            <a:extLst>
-              <a:ext uri="{FF2B5EF4-FFF2-40B4-BE49-F238E27FC236}">
-                <a16:creationId xmlns:a16="http://schemas.microsoft.com/office/drawing/2014/main" id="{55830AD6-028B-4C4E-80BF-B70DFC1C3A46}"/>
-              </a:ext>
-            </a:extLst>
-          </p:cNvPr>
-          <p:cNvSpPr txBox="1"/>
-          <p:nvPr/>
-        </p:nvSpPr>
-        <p:spPr>
-          <a:xfrm>
-            <a:off x="567542" y="1216429"/>
-            <a:ext cx="7879080" cy="461665"/>
-          </a:xfrm>
-          <a:prstGeom prst="rect">
-            <a:avLst/>
-          </a:prstGeom>
-          <a:noFill/>
-        </p:spPr>
-        <p:txBody>
-          <a:bodyPr wrap="none" rtlCol="0">
-            <a:spAutoFit/>
-          </a:bodyPr>
-          <a:lstStyle/>
-          <a:p>
-            <a:r>
-              <a:rPr lang="ja-JP" altLang="en-US" sz="2400" dirty="0"/>
-              <a:t>運動摩擦力は動いているものに対して働く摩擦力です。</a:t>
-            </a:r>
-            <a:endParaRPr lang="en-US" altLang="ja-JP" sz="2400" b="0" dirty="0"/>
-          </a:p>
-        </p:txBody>
-      </p:sp>
-      <p:grpSp>
-        <p:nvGrpSpPr>
-          <p:cNvPr id="5" name="グループ化 4">
-            <a:extLst>
-              <a:ext uri="{FF2B5EF4-FFF2-40B4-BE49-F238E27FC236}">
-                <a16:creationId xmlns:a16="http://schemas.microsoft.com/office/drawing/2014/main" id="{1B69A5F0-E23F-4035-A684-28D16776EF7E}"/>
-              </a:ext>
-            </a:extLst>
-          </p:cNvPr>
-          <p:cNvGrpSpPr/>
-          <p:nvPr/>
-        </p:nvGrpSpPr>
-        <p:grpSpPr>
-          <a:xfrm>
-            <a:off x="567542" y="2622603"/>
-            <a:ext cx="2522791" cy="2341525"/>
-            <a:chOff x="2114550" y="3236950"/>
-            <a:chExt cx="2522791" cy="2341525"/>
-          </a:xfrm>
-        </p:grpSpPr>
-        <p:cxnSp>
-          <p:nvCxnSpPr>
-            <p:cNvPr id="7" name="直線コネクタ 6">
-              <a:extLst>
-                <a:ext uri="{FF2B5EF4-FFF2-40B4-BE49-F238E27FC236}">
-                  <a16:creationId xmlns:a16="http://schemas.microsoft.com/office/drawing/2014/main" id="{2FF5C351-82D3-42FC-AB35-1732EF0DA162}"/>
-                </a:ext>
-              </a:extLst>
-            </p:cNvPr>
-            <p:cNvCxnSpPr>
-              <a:cxnSpLocks/>
-            </p:cNvCxnSpPr>
-            <p:nvPr/>
-          </p:nvCxnSpPr>
-          <p:spPr>
-            <a:xfrm flipV="1">
-              <a:off x="2114550" y="3236950"/>
-              <a:ext cx="2522791" cy="2341525"/>
-            </a:xfrm>
-            <a:prstGeom prst="line">
-              <a:avLst/>
-            </a:prstGeom>
-            <a:ln w="38100">
-              <a:solidFill>
-                <a:schemeClr val="bg1">
-                  <a:lumMod val="50000"/>
-                </a:schemeClr>
-              </a:solidFill>
-            </a:ln>
-          </p:spPr>
-          <p:style>
-            <a:lnRef idx="1">
-              <a:schemeClr val="accent1"/>
-            </a:lnRef>
-            <a:fillRef idx="0">
-              <a:schemeClr val="accent1"/>
-            </a:fillRef>
-            <a:effectRef idx="0">
-              <a:schemeClr val="accent1"/>
-            </a:effectRef>
-            <a:fontRef idx="minor">
-              <a:schemeClr val="tx1"/>
-            </a:fontRef>
-          </p:style>
-        </p:cxnSp>
-        <p:sp>
-          <p:nvSpPr>
-            <p:cNvPr id="8" name="台形 7">
-              <a:extLst>
-                <a:ext uri="{FF2B5EF4-FFF2-40B4-BE49-F238E27FC236}">
-                  <a16:creationId xmlns:a16="http://schemas.microsoft.com/office/drawing/2014/main" id="{F64C426F-B3E6-4881-91F5-58871260F313}"/>
-                </a:ext>
-              </a:extLst>
-            </p:cNvPr>
-            <p:cNvSpPr/>
-            <p:nvPr/>
-          </p:nvSpPr>
-          <p:spPr>
-            <a:xfrm rot="19022851">
-              <a:off x="2521895" y="3850813"/>
-              <a:ext cx="1109133" cy="685800"/>
-            </a:xfrm>
-            <a:prstGeom prst="trapezoid">
-              <a:avLst/>
-            </a:prstGeom>
-          </p:spPr>
-          <p:style>
-            <a:lnRef idx="2">
-              <a:schemeClr val="accent3">
-                <a:shade val="50000"/>
-              </a:schemeClr>
-            </a:lnRef>
-            <a:fillRef idx="1">
-              <a:schemeClr val="accent3"/>
-            </a:fillRef>
-            <a:effectRef idx="0">
-              <a:schemeClr val="accent3"/>
-            </a:effectRef>
-            <a:fontRef idx="minor">
-              <a:schemeClr val="lt1"/>
-            </a:fontRef>
-          </p:style>
-          <p:txBody>
-            <a:bodyPr rtlCol="0" anchor="ctr"/>
-            <a:lstStyle/>
-            <a:p>
-              <a:pPr algn="ctr"/>
-              <a:r>
-                <a:rPr kumimoji="1" lang="ja-JP" altLang="en-US" b="1" dirty="0"/>
-                <a:t>重り</a:t>
-              </a:r>
-            </a:p>
-          </p:txBody>
-        </p:sp>
-      </p:grpSp>
-      <p:cxnSp>
-        <p:nvCxnSpPr>
-          <p:cNvPr id="9" name="直線コネクタ 8">
-            <a:extLst>
-              <a:ext uri="{FF2B5EF4-FFF2-40B4-BE49-F238E27FC236}">
-                <a16:creationId xmlns:a16="http://schemas.microsoft.com/office/drawing/2014/main" id="{718A324A-0A74-454F-B6FF-D2F6D0644CB4}"/>
-              </a:ext>
-            </a:extLst>
-          </p:cNvPr>
-          <p:cNvCxnSpPr>
-            <a:cxnSpLocks/>
-          </p:cNvCxnSpPr>
-          <p:nvPr/>
-        </p:nvCxnSpPr>
-        <p:spPr>
-          <a:xfrm flipV="1">
-            <a:off x="1604432" y="2059337"/>
-            <a:ext cx="764820" cy="719667"/>
-          </a:xfrm>
-          <a:prstGeom prst="line">
-            <a:avLst/>
-          </a:prstGeom>
-          <a:ln w="38100">
-            <a:solidFill>
-              <a:schemeClr val="tx1"/>
-            </a:solidFill>
-          </a:ln>
-        </p:spPr>
-        <p:style>
-          <a:lnRef idx="1">
-            <a:schemeClr val="accent1"/>
-          </a:lnRef>
-          <a:fillRef idx="0">
-            <a:schemeClr val="accent1"/>
-          </a:fillRef>
-          <a:effectRef idx="0">
-            <a:schemeClr val="accent1"/>
-          </a:effectRef>
-          <a:fontRef idx="minor">
-            <a:schemeClr val="tx1"/>
-          </a:fontRef>
-        </p:style>
-      </p:cxnSp>
-      <p:cxnSp>
-        <p:nvCxnSpPr>
-          <p:cNvPr id="10" name="直線コネクタ 9">
-            <a:extLst>
-              <a:ext uri="{FF2B5EF4-FFF2-40B4-BE49-F238E27FC236}">
-                <a16:creationId xmlns:a16="http://schemas.microsoft.com/office/drawing/2014/main" id="{BF3C9F56-5ABC-470E-9D8F-1470E08B0A6D}"/>
-              </a:ext>
-            </a:extLst>
-          </p:cNvPr>
-          <p:cNvCxnSpPr>
-            <a:cxnSpLocks/>
-          </p:cNvCxnSpPr>
-          <p:nvPr/>
-        </p:nvCxnSpPr>
-        <p:spPr>
-          <a:xfrm flipV="1">
-            <a:off x="2020177" y="1817794"/>
-            <a:ext cx="961679" cy="929276"/>
-          </a:xfrm>
-          <a:prstGeom prst="line">
-            <a:avLst/>
-          </a:prstGeom>
-          <a:ln w="38100">
-            <a:solidFill>
-              <a:schemeClr val="tx1"/>
-            </a:solidFill>
-          </a:ln>
-        </p:spPr>
-        <p:style>
-          <a:lnRef idx="1">
-            <a:schemeClr val="accent1"/>
-          </a:lnRef>
-          <a:fillRef idx="0">
-            <a:schemeClr val="accent1"/>
-          </a:fillRef>
-          <a:effectRef idx="0">
-            <a:schemeClr val="accent1"/>
-          </a:effectRef>
-          <a:fontRef idx="minor">
-            <a:schemeClr val="tx1"/>
-          </a:fontRef>
-        </p:style>
-      </p:cxnSp>
-      <p:cxnSp>
-        <p:nvCxnSpPr>
-          <p:cNvPr id="11" name="直線コネクタ 10">
-            <a:extLst>
-              <a:ext uri="{FF2B5EF4-FFF2-40B4-BE49-F238E27FC236}">
-                <a16:creationId xmlns:a16="http://schemas.microsoft.com/office/drawing/2014/main" id="{10F344DC-E54C-4B63-A2C3-34CD54608A53}"/>
-              </a:ext>
-            </a:extLst>
-          </p:cNvPr>
-          <p:cNvCxnSpPr>
-            <a:cxnSpLocks/>
-          </p:cNvCxnSpPr>
-          <p:nvPr/>
-        </p:nvCxnSpPr>
-        <p:spPr>
-          <a:xfrm flipV="1">
-            <a:off x="2038938" y="2520945"/>
-            <a:ext cx="596299" cy="531355"/>
-          </a:xfrm>
-          <a:prstGeom prst="line">
-            <a:avLst/>
-          </a:prstGeom>
-          <a:ln w="38100">
-            <a:solidFill>
-              <a:schemeClr val="tx1"/>
-            </a:solidFill>
-          </a:ln>
-        </p:spPr>
-        <p:style>
-          <a:lnRef idx="1">
-            <a:schemeClr val="accent1"/>
-          </a:lnRef>
-          <a:fillRef idx="0">
-            <a:schemeClr val="accent1"/>
-          </a:fillRef>
-          <a:effectRef idx="0">
-            <a:schemeClr val="accent1"/>
-          </a:effectRef>
-          <a:fontRef idx="minor">
-            <a:schemeClr val="tx1"/>
-          </a:fontRef>
-        </p:style>
-      </p:cxnSp>
-      <p:cxnSp>
-        <p:nvCxnSpPr>
-          <p:cNvPr id="3" name="直線矢印コネクタ 2">
-            <a:extLst>
-              <a:ext uri="{FF2B5EF4-FFF2-40B4-BE49-F238E27FC236}">
-                <a16:creationId xmlns:a16="http://schemas.microsoft.com/office/drawing/2014/main" id="{2714CCAD-8BA9-4ECA-99E3-ED81FDB3E9B0}"/>
-              </a:ext>
-            </a:extLst>
-          </p:cNvPr>
-          <p:cNvCxnSpPr/>
-          <p:nvPr/>
-        </p:nvCxnSpPr>
-        <p:spPr>
-          <a:xfrm flipH="1">
-            <a:off x="2252133" y="3141133"/>
-            <a:ext cx="838200" cy="846667"/>
-          </a:xfrm>
-          <a:prstGeom prst="straightConnector1">
-            <a:avLst/>
-          </a:prstGeom>
-          <a:ln w="38100">
-            <a:solidFill>
-              <a:srgbClr val="FF0000"/>
-            </a:solidFill>
-            <a:tailEnd type="triangle"/>
-          </a:ln>
-        </p:spPr>
-        <p:style>
-          <a:lnRef idx="1">
-            <a:schemeClr val="accent1"/>
-          </a:lnRef>
-          <a:fillRef idx="0">
-            <a:schemeClr val="accent1"/>
-          </a:fillRef>
-          <a:effectRef idx="0">
-            <a:schemeClr val="accent1"/>
-          </a:effectRef>
-          <a:fontRef idx="minor">
-            <a:schemeClr val="tx1"/>
-          </a:fontRef>
-        </p:style>
-      </p:cxnSp>
-      <p:sp>
-        <p:nvSpPr>
-          <p:cNvPr id="14" name="テキスト ボックス 13">
-            <a:extLst>
-              <a:ext uri="{FF2B5EF4-FFF2-40B4-BE49-F238E27FC236}">
-                <a16:creationId xmlns:a16="http://schemas.microsoft.com/office/drawing/2014/main" id="{C7EFC35B-4CD9-45E6-B486-2C5CB5A368A0}"/>
-              </a:ext>
-            </a:extLst>
-          </p:cNvPr>
-          <p:cNvSpPr txBox="1"/>
-          <p:nvPr/>
-        </p:nvSpPr>
-        <p:spPr>
-          <a:xfrm>
-            <a:off x="2671233" y="3579366"/>
-            <a:ext cx="1107996" cy="646331"/>
-          </a:xfrm>
-          <a:prstGeom prst="rect">
-            <a:avLst/>
-          </a:prstGeom>
-          <a:noFill/>
-        </p:spPr>
-        <p:txBody>
-          <a:bodyPr wrap="none" rtlCol="0">
-            <a:spAutoFit/>
-          </a:bodyPr>
-          <a:lstStyle/>
-          <a:p>
-            <a:r>
-              <a:rPr lang="ja-JP" altLang="en-US" sz="2400" dirty="0"/>
-              <a:t>滑る力</a:t>
-            </a:r>
-            <a:endParaRPr lang="en-US" altLang="ja-JP" sz="2400" dirty="0"/>
-          </a:p>
-          <a:p>
-            <a:r>
-              <a:rPr lang="ja-JP" altLang="en-US" sz="1200" b="0" dirty="0"/>
-              <a:t>だけでなく</a:t>
-            </a:r>
-            <a:endParaRPr lang="en-US" altLang="ja-JP" sz="1200" b="0" dirty="0"/>
-          </a:p>
-        </p:txBody>
-      </p:sp>
-      <p:cxnSp>
-        <p:nvCxnSpPr>
-          <p:cNvPr id="15" name="直線矢印コネクタ 14">
-            <a:extLst>
-              <a:ext uri="{FF2B5EF4-FFF2-40B4-BE49-F238E27FC236}">
-                <a16:creationId xmlns:a16="http://schemas.microsoft.com/office/drawing/2014/main" id="{FFA122FC-A037-4D45-98B4-95CF45C4F5CF}"/>
-              </a:ext>
-            </a:extLst>
-          </p:cNvPr>
-          <p:cNvCxnSpPr>
-            <a:cxnSpLocks/>
-          </p:cNvCxnSpPr>
-          <p:nvPr/>
-        </p:nvCxnSpPr>
-        <p:spPr>
-          <a:xfrm flipV="1">
-            <a:off x="1359593" y="4605468"/>
-            <a:ext cx="339720" cy="358660"/>
-          </a:xfrm>
-          <a:prstGeom prst="straightConnector1">
-            <a:avLst/>
-          </a:prstGeom>
-          <a:ln w="38100">
-            <a:solidFill>
-              <a:srgbClr val="00B050"/>
-            </a:solidFill>
-            <a:tailEnd type="triangle"/>
-          </a:ln>
-        </p:spPr>
-        <p:style>
-          <a:lnRef idx="1">
-            <a:schemeClr val="accent1"/>
-          </a:lnRef>
-          <a:fillRef idx="0">
-            <a:schemeClr val="accent1"/>
-          </a:fillRef>
-          <a:effectRef idx="0">
-            <a:schemeClr val="accent1"/>
-          </a:effectRef>
-          <a:fontRef idx="minor">
-            <a:schemeClr val="tx1"/>
-          </a:fontRef>
-        </p:style>
-      </p:cxnSp>
-      <p:sp>
-        <p:nvSpPr>
-          <p:cNvPr id="17" name="テキスト ボックス 16">
-            <a:extLst>
-              <a:ext uri="{FF2B5EF4-FFF2-40B4-BE49-F238E27FC236}">
-                <a16:creationId xmlns:a16="http://schemas.microsoft.com/office/drawing/2014/main" id="{10F5EA89-254C-4FA0-B7E7-A9A57BC38A62}"/>
-              </a:ext>
-            </a:extLst>
-          </p:cNvPr>
-          <p:cNvSpPr txBox="1"/>
-          <p:nvPr/>
-        </p:nvSpPr>
-        <p:spPr>
-          <a:xfrm>
-            <a:off x="1557469" y="4784798"/>
-            <a:ext cx="3877985" cy="461665"/>
-          </a:xfrm>
-          <a:prstGeom prst="rect">
-            <a:avLst/>
-          </a:prstGeom>
-          <a:noFill/>
-        </p:spPr>
-        <p:txBody>
-          <a:bodyPr wrap="none" rtlCol="0">
-            <a:spAutoFit/>
-          </a:bodyPr>
-          <a:lstStyle/>
-          <a:p>
-            <a:r>
-              <a:rPr lang="ja-JP" altLang="en-US" sz="2400" dirty="0"/>
-              <a:t>運動摩擦力が抵抗している</a:t>
-            </a:r>
-            <a:endParaRPr lang="en-US" altLang="ja-JP" sz="1200" b="0" dirty="0"/>
-          </a:p>
-        </p:txBody>
-      </p:sp>
-    </p:spTree>
-    <p:extLst>
-      <p:ext uri="{BB962C8B-B14F-4D97-AF65-F5344CB8AC3E}">
-        <p14:creationId xmlns:p14="http://schemas.microsoft.com/office/powerpoint/2010/main" val="1422042557"/>
       </p:ext>
     </p:extLst>
   </p:cSld>

--- a/ゲーム科2年/00_前期/ゲーム開発Ⅰ/ゲーム物理学/座学/17_摩擦力.pptx
+++ b/ゲーム科2年/00_前期/ゲーム開発Ⅰ/ゲーム物理学/座学/17_摩擦力.pptx
@@ -273,7 +273,7 @@
           <a:p>
             <a:fld id="{E9CC885B-4903-4D54-9A93-00025F12DED9}" type="datetimeFigureOut">
               <a:rPr kumimoji="1" lang="ja-JP" altLang="en-US" smtClean="0"/>
-              <a:t>2025/9/24</a:t>
+              <a:t>2025/9/29</a:t>
             </a:fld>
             <a:endParaRPr kumimoji="1" lang="ja-JP" altLang="en-US"/>
           </a:p>
@@ -503,7 +503,7 @@
           <a:p>
             <a:fld id="{E9CC885B-4903-4D54-9A93-00025F12DED9}" type="datetimeFigureOut">
               <a:rPr kumimoji="1" lang="ja-JP" altLang="en-US" smtClean="0"/>
-              <a:t>2025/9/24</a:t>
+              <a:t>2025/9/29</a:t>
             </a:fld>
             <a:endParaRPr kumimoji="1" lang="ja-JP" altLang="en-US"/>
           </a:p>
@@ -743,7 +743,7 @@
           <a:p>
             <a:fld id="{E9CC885B-4903-4D54-9A93-00025F12DED9}" type="datetimeFigureOut">
               <a:rPr kumimoji="1" lang="ja-JP" altLang="en-US" smtClean="0"/>
-              <a:t>2025/9/24</a:t>
+              <a:t>2025/9/29</a:t>
             </a:fld>
             <a:endParaRPr kumimoji="1" lang="ja-JP" altLang="en-US"/>
           </a:p>
@@ -973,7 +973,7 @@
           <a:p>
             <a:fld id="{E9CC885B-4903-4D54-9A93-00025F12DED9}" type="datetimeFigureOut">
               <a:rPr kumimoji="1" lang="ja-JP" altLang="en-US" smtClean="0"/>
-              <a:t>2025/9/24</a:t>
+              <a:t>2025/9/29</a:t>
             </a:fld>
             <a:endParaRPr kumimoji="1" lang="ja-JP" altLang="en-US"/>
           </a:p>
@@ -1248,7 +1248,7 @@
           <a:p>
             <a:fld id="{E9CC885B-4903-4D54-9A93-00025F12DED9}" type="datetimeFigureOut">
               <a:rPr kumimoji="1" lang="ja-JP" altLang="en-US" smtClean="0"/>
-              <a:t>2025/9/24</a:t>
+              <a:t>2025/9/29</a:t>
             </a:fld>
             <a:endParaRPr kumimoji="1" lang="ja-JP" altLang="en-US"/>
           </a:p>
@@ -1577,7 +1577,7 @@
           <a:p>
             <a:fld id="{E9CC885B-4903-4D54-9A93-00025F12DED9}" type="datetimeFigureOut">
               <a:rPr kumimoji="1" lang="ja-JP" altLang="en-US" smtClean="0"/>
-              <a:t>2025/9/24</a:t>
+              <a:t>2025/9/29</a:t>
             </a:fld>
             <a:endParaRPr kumimoji="1" lang="ja-JP" altLang="en-US"/>
           </a:p>
@@ -2053,7 +2053,7 @@
           <a:p>
             <a:fld id="{E9CC885B-4903-4D54-9A93-00025F12DED9}" type="datetimeFigureOut">
               <a:rPr kumimoji="1" lang="ja-JP" altLang="en-US" smtClean="0"/>
-              <a:t>2025/9/24</a:t>
+              <a:t>2025/9/29</a:t>
             </a:fld>
             <a:endParaRPr kumimoji="1" lang="ja-JP" altLang="en-US"/>
           </a:p>
@@ -2194,7 +2194,7 @@
           <a:p>
             <a:fld id="{E9CC885B-4903-4D54-9A93-00025F12DED9}" type="datetimeFigureOut">
               <a:rPr kumimoji="1" lang="ja-JP" altLang="en-US" smtClean="0"/>
-              <a:t>2025/9/24</a:t>
+              <a:t>2025/9/29</a:t>
             </a:fld>
             <a:endParaRPr kumimoji="1" lang="ja-JP" altLang="en-US"/>
           </a:p>
@@ -2307,7 +2307,7 @@
           <a:p>
             <a:fld id="{E9CC885B-4903-4D54-9A93-00025F12DED9}" type="datetimeFigureOut">
               <a:rPr kumimoji="1" lang="ja-JP" altLang="en-US" smtClean="0"/>
-              <a:t>2025/9/24</a:t>
+              <a:t>2025/9/29</a:t>
             </a:fld>
             <a:endParaRPr kumimoji="1" lang="ja-JP" altLang="en-US"/>
           </a:p>
@@ -2650,7 +2650,7 @@
           <a:p>
             <a:fld id="{E9CC885B-4903-4D54-9A93-00025F12DED9}" type="datetimeFigureOut">
               <a:rPr kumimoji="1" lang="ja-JP" altLang="en-US" smtClean="0"/>
-              <a:t>2025/9/24</a:t>
+              <a:t>2025/9/29</a:t>
             </a:fld>
             <a:endParaRPr kumimoji="1" lang="ja-JP" altLang="en-US"/>
           </a:p>
@@ -2938,7 +2938,7 @@
           <a:p>
             <a:fld id="{E9CC885B-4903-4D54-9A93-00025F12DED9}" type="datetimeFigureOut">
               <a:rPr kumimoji="1" lang="ja-JP" altLang="en-US" smtClean="0"/>
-              <a:t>2025/9/24</a:t>
+              <a:t>2025/9/29</a:t>
             </a:fld>
             <a:endParaRPr kumimoji="1" lang="ja-JP" altLang="en-US"/>
           </a:p>
@@ -3211,7 +3211,7 @@
           <a:p>
             <a:fld id="{E9CC885B-4903-4D54-9A93-00025F12DED9}" type="datetimeFigureOut">
               <a:rPr kumimoji="1" lang="ja-JP" altLang="en-US" smtClean="0"/>
-              <a:t>2025/9/24</a:t>
+              <a:t>2025/9/29</a:t>
             </a:fld>
             <a:endParaRPr kumimoji="1" lang="ja-JP" altLang="en-US"/>
           </a:p>
@@ -9121,7 +9121,7 @@
         <p:spPr>
           <a:xfrm>
             <a:off x="567542" y="1216429"/>
-            <a:ext cx="8494633" cy="830997"/>
+            <a:ext cx="11364008" cy="830997"/>
           </a:xfrm>
           <a:prstGeom prst="rect">
             <a:avLst/>
@@ -9136,7 +9136,7 @@
           <a:p>
             <a:r>
               <a:rPr lang="ja-JP" altLang="en-US" sz="2400" dirty="0"/>
-              <a:t>斜面をある角度まで傾けると滑り出します。</a:t>
+              <a:t>ある角度まで傾けると滑り出します。</a:t>
             </a:r>
             <a:endParaRPr lang="en-US" altLang="ja-JP" sz="2400" dirty="0"/>
           </a:p>
@@ -9151,7 +9151,23 @@
                   <a:srgbClr val="FF0000"/>
                 </a:solidFill>
               </a:rPr>
-              <a:t>静止摩擦力よりも滑る力が上回った</a:t>
+              <a:t>静止摩擦力には</a:t>
+            </a:r>
+            <a:r>
+              <a:rPr lang="en-US" altLang="ja-JP" sz="2400" b="1" dirty="0">
+                <a:solidFill>
+                  <a:srgbClr val="FF0000"/>
+                </a:solidFill>
+              </a:rPr>
+              <a:t>MAX</a:t>
+            </a:r>
+            <a:r>
+              <a:rPr lang="ja-JP" altLang="en-US" sz="2400" b="1" dirty="0">
+                <a:solidFill>
+                  <a:srgbClr val="FF0000"/>
+                </a:solidFill>
+              </a:rPr>
+              <a:t>値があり、それを滑る力が上回った</a:t>
             </a:r>
             <a:r>
               <a:rPr lang="ja-JP" altLang="en-US" sz="2400" dirty="0"/>
